--- a/docs/decks/BrokerVerse_Business_Administrator_Guide.pptx
+++ b/docs/decks/BrokerVerse_Business_Administrator_Guide.pptx
@@ -3274,7 +3274,7 @@
                 </a:solidFill>
                 <a:latin typeface="Calibri"/>
               </a:rPr>
-              <a:t>BDO Insure (BDOI) insurance broking · Philippines · PHP</a:t>
+              <a:t>BrokerVerse OOTB · insurance broking · Philippines · PHP</a:t>
             </a:r>
           </a:p>
         </p:txBody>
@@ -3821,7 +3821,7 @@
                 </a:solidFill>
                 <a:latin typeface="Calibri"/>
               </a:rPr>
-              <a:t>Home (business overview dashboard)</a:t>
+              <a:t>Executive Dashboard</a:t>
             </a:r>
           </a:p>
         </p:txBody>
@@ -4876,7 +4876,37 @@
                 </a:solidFill>
                 <a:latin typeface="Calibri"/>
               </a:rPr>
-              <a:t>Finance calculates, a second person approves the batch, statements follow.</a:t>
+              <a:t>Finance calculates, a second finance user approves the batch, statements follow.</a:t>
+            </a:r>
+          </a:p>
+          <a:p>
+            <a:pPr marL="201168" indent="-182880">
+              <a:spcAft>
+                <a:spcPts val="1000"/>
+              </a:spcAft>
+              <a:buClr>
+                <a:srgbClr val="1E88E5"/>
+              </a:buClr>
+              <a:buFont typeface="Arial"/>
+              <a:buChar char="•"/>
+            </a:pPr>
+            <a:r>
+              <a:rPr b="1" sz="1500">
+                <a:solidFill>
+                  <a:srgbClr val="0B4F9C"/>
+                </a:solidFill>
+                <a:latin typeface="Calibri"/>
+              </a:rPr>
+              <a:t>Rule:  </a:t>
+            </a:r>
+            <a:r>
+              <a:rPr sz="1500">
+                <a:solidFill>
+                  <a:srgbClr val="1F2937"/>
+                </a:solidFill>
+                <a:latin typeface="Calibri"/>
+              </a:rPr>
+              <a:t>programmes are master data: Finance cannot change the programmes it pays.</a:t>
             </a:r>
           </a:p>
           <a:p>
@@ -7725,7 +7755,7 @@
                 </a:solidFill>
                 <a:latin typeface="Calibri"/>
               </a:rPr>
-              <a:t>REPORTS &gt; OPERATIONAL / FINANCIAL</a:t>
+              <a:t>REPORTS &gt; ALL REPORTS</a:t>
             </a:r>
           </a:p>
         </p:txBody>
@@ -8219,7 +8249,7 @@
                 </a:solidFill>
                 <a:latin typeface="Calibri"/>
               </a:rPr>
-              <a:t>All 18 reports are in your catalogue.</a:t>
+              <a:t>All 19 reports are in your catalogue (Reports &gt; All Reports).</a:t>
             </a:r>
           </a:p>
         </p:txBody>
@@ -8766,7 +8796,7 @@
         </p:nvGraphicFramePr>
         <p:xfrm>
           <a:off x="6190488" y="1783080"/>
-          <a:ext cx="5541262" cy="3291840"/>
+          <a:ext cx="5541262" cy="3657600"/>
         </p:xfrm>
         <a:graphic>
           <a:graphicData uri="http://schemas.openxmlformats.org/drawingml/2006/table">
@@ -8975,7 +9005,7 @@
                           </a:solidFill>
                           <a:latin typeface="Calibri"/>
                         </a:rPr>
-                        <a:t>Receipts Register</a:t>
+                        <a:t>Commission Receivable – Direct Bill</a:t>
                       </a:r>
                     </a:p>
                   </a:txBody>
@@ -8997,7 +9027,7 @@
                           </a:solidFill>
                           <a:latin typeface="Calibri"/>
                         </a:rPr>
-                        <a:t>Official receipts: bill, policy, payment mode, bank, reference</a:t>
+                        <a:t>Commission and VAT due from insurers on direct-bill policies, with ageing</a:t>
                       </a:r>
                     </a:p>
                   </a:txBody>
@@ -9021,7 +9051,7 @@
                           </a:solidFill>
                           <a:latin typeface="Calibri"/>
                         </a:rPr>
-                        <a:t>Payables / Disbursement Register</a:t>
+                        <a:t>Receipts Register</a:t>
                       </a:r>
                     </a:p>
                   </a:txBody>
@@ -9043,7 +9073,7 @@
                           </a:solidFill>
                           <a:latin typeface="Calibri"/>
                         </a:rPr>
-                        <a:t>Payment vouchers to insurers, agents, clients, vendors with approval and paid dates</a:t>
+                        <a:t>Official receipts: bill, policy, payment mode, bank, reference</a:t>
                       </a:r>
                     </a:p>
                   </a:txBody>
@@ -9067,7 +9097,7 @@
                           </a:solidFill>
                           <a:latin typeface="Calibri"/>
                         </a:rPr>
-                        <a:t>Journal Register</a:t>
+                        <a:t>Payables / Disbursement Register</a:t>
                       </a:r>
                     </a:p>
                   </a:txBody>
@@ -9089,7 +9119,7 @@
                           </a:solidFill>
                           <a:latin typeface="Calibri"/>
                         </a:rPr>
-                        <a:t>Journal lines: account, debit, credit, memo</a:t>
+                        <a:t>Payment vouchers to insurers, agents, clients, vendors with approval and paid dates</a:t>
                       </a:r>
                     </a:p>
                   </a:txBody>
@@ -9113,7 +9143,7 @@
                           </a:solidFill>
                           <a:latin typeface="Calibri"/>
                         </a:rPr>
-                        <a:t>Trial Balance</a:t>
+                        <a:t>Journal Register</a:t>
                       </a:r>
                     </a:p>
                   </a:txBody>
@@ -9135,7 +9165,7 @@
                           </a:solidFill>
                           <a:latin typeface="Calibri"/>
                         </a:rPr>
-                        <a:t>Opening, period debits and credits, closing balance per account (approved and posted JVs)</a:t>
+                        <a:t>Journal lines: account, debit, credit, memo</a:t>
                       </a:r>
                     </a:p>
                   </a:txBody>
@@ -9159,7 +9189,7 @@
                           </a:solidFill>
                           <a:latin typeface="Calibri"/>
                         </a:rPr>
-                        <a:t>Incentive Results</a:t>
+                        <a:t>Trial Balance</a:t>
                       </a:r>
                     </a:p>
                   </a:txBody>
@@ -9181,13 +9211,59 @@
                           </a:solidFill>
                           <a:latin typeface="Calibri"/>
                         </a:rPr>
+                        <a:t>Opening, period debits and credits, closing balance per account (approved and posted JVs)</a:t>
+                      </a:r>
+                    </a:p>
+                  </a:txBody>
+                  <a:tcPr marL="73152" marR="73152" marT="27432" marB="27432" anchor="ctr">
+                    <a:solidFill>
+                      <a:srgbClr val="FFFFFF"/>
+                    </a:solidFill>
+                  </a:tcPr>
+                </a:tc>
+              </a:tr>
+              <a:tr h="365760">
+                <a:tc>
+                  <a:txBody>
+                    <a:bodyPr wrap="square"/>
+                    <a:lstStyle/>
+                    <a:p>
+                      <a:r>
+                        <a:rPr sz="950" b="1">
+                          <a:solidFill>
+                            <a:srgbClr val="0B4F9C"/>
+                          </a:solidFill>
+                          <a:latin typeface="Calibri"/>
+                        </a:rPr>
+                        <a:t>Incentive Results</a:t>
+                      </a:r>
+                    </a:p>
+                  </a:txBody>
+                  <a:tcPr marL="73152" marR="73152" marT="27432" marB="27432" anchor="ctr">
+                    <a:solidFill>
+                      <a:srgbClr val="F5F8FC"/>
+                    </a:solidFill>
+                  </a:tcPr>
+                </a:tc>
+                <a:tc>
+                  <a:txBody>
+                    <a:bodyPr wrap="square"/>
+                    <a:lstStyle/>
+                    <a:p>
+                      <a:r>
+                        <a:rPr sz="950">
+                          <a:solidFill>
+                            <a:srgbClr val="1F2937"/>
+                          </a:solidFill>
+                          <a:latin typeface="Calibri"/>
+                        </a:rPr>
                         <a:t>Programme target, achieved, achievement % and payout per agent</a:t>
                       </a:r>
                     </a:p>
                   </a:txBody>
                   <a:tcPr marL="73152" marR="73152" marT="27432" marB="27432" anchor="ctr">
                     <a:solidFill>
-                      <a:srgbClr val="FFFFFF"/>
+                      <a:srgbClr val="F5F8FC"/>
                     </a:solidFill>
                   </a:tcPr>
                 </a:tc>
@@ -10565,7 +10641,7 @@
                 </a:solidFill>
                 <a:latin typeface="Calibri"/>
               </a:rPr>
-              <a:t>A calculated batch needs approval before payout.</a:t>
+              <a:t>Addressed to the users who may approve it.</a:t>
             </a:r>
           </a:p>
         </p:txBody>
@@ -11300,7 +11376,7 @@
                 </a:solidFill>
                 <a:latin typeface="Calibri"/>
               </a:rPr>
-              <a:t>Some date pickers still show month-first dates (MM/DD/YYYY) although the configured format is DD/MM/YYYY.</a:t>
+              <a:t>Your session is kept in the browser’s local storage: sign out on shared computers and keep the browser up to date.</a:t>
             </a:r>
           </a:p>
           <a:p>
@@ -11321,7 +11397,7 @@
                 </a:solidFill>
                 <a:latin typeface="Calibri"/>
               </a:rPr>
-              <a:t>A few screens use the browser’s own confirm boxes instead of in-app dialogs.</a:t>
+              <a:t>Two-factor set-up shows a setup key and an app link, but no QR code: type the key into the authenticator app.</a:t>
             </a:r>
           </a:p>
           <a:p>
@@ -11342,7 +11418,7 @@
                 </a:solidFill>
                 <a:latin typeface="Calibri"/>
               </a:rPr>
-              <a:t>Some quote lists (policy types, vehicle details, signatories) are fixed lists until linked to the masters.</a:t>
+              <a:t>Screens are in English or Thai; Filipino is configured but has no translation yet.</a:t>
             </a:r>
           </a:p>
           <a:p>
@@ -11363,49 +11439,7 @@
                 </a:solidFill>
                 <a:latin typeface="Calibri"/>
               </a:rPr>
-              <a:t>CTPL treatment (separate policy or part of the premium) is awaiting a business decision.</a:t>
-            </a:r>
-          </a:p>
-          <a:p>
-            <a:pPr marL="201168" indent="-182880">
-              <a:spcAft>
-                <a:spcPts val="800"/>
-              </a:spcAft>
-              <a:buClr>
-                <a:srgbClr val="5B6778"/>
-              </a:buClr>
-              <a:buFont typeface="Arial"/>
-              <a:buChar char="•"/>
-            </a:pPr>
-            <a:r>
-              <a:rPr sz="1500">
-                <a:solidFill>
-                  <a:srgbClr val="1F2937"/>
-                </a:solidFill>
-                <a:latin typeface="Calibri"/>
-              </a:rPr>
-              <a:t>Chart of accounts has no operating-expense accounts yet.</a:t>
-            </a:r>
-          </a:p>
-          <a:p>
-            <a:pPr marL="201168" indent="-182880">
-              <a:spcAft>
-                <a:spcPts val="800"/>
-              </a:spcAft>
-              <a:buClr>
-                <a:srgbClr val="5B6778"/>
-              </a:buClr>
-              <a:buFont typeface="Arial"/>
-              <a:buChar char="•"/>
-            </a:pPr>
-            <a:r>
-              <a:rPr sz="1500">
-                <a:solidFill>
-                  <a:srgbClr val="1F2937"/>
-                </a:solidFill>
-                <a:latin typeface="Calibri"/>
-              </a:rPr>
-              <a:t>Direct Bill Processing (insured bill vs insurer remittance) awaits a business decision.</a:t>
+              <a:t>Values moved from code to Configuration (limits, windows, e-mail texts) are seeded with the former values: confirm them.</a:t>
             </a:r>
           </a:p>
         </p:txBody>
@@ -11896,7 +11930,7 @@
                 </a:solidFill>
                 <a:latin typeface="Calibri"/>
               </a:rPr>
-              <a:t>&lt;to be confirmed by BDOI&gt;</a:t>
+              <a:t>&lt;service desk to be confirmed&gt;</a:t>
             </a:r>
           </a:p>
         </p:txBody>
@@ -12575,7 +12609,7 @@
                 </a:solidFill>
                 <a:latin typeface="Calibri"/>
               </a:rPr>
-              <a:t>every operational and financial menu, dashboards and all 18 reports.</a:t>
+              <a:t>every operational and financial menu, dashboards and all 19 reports.</a:t>
             </a:r>
           </a:p>
           <a:p>
@@ -12719,7 +12753,7 @@
                 </a:solidFill>
                 <a:latin typeface="Calibri"/>
               </a:rPr>
-              <a:t>User name bea.admin. Lands on Home, the business overview dashboard.</a:t>
+              <a:t>User name bea.admin. Lands on the Executive Dashboard.</a:t>
             </a:r>
           </a:p>
         </p:txBody>
@@ -12947,7 +12981,7 @@
                 </a:solidFill>
                 <a:latin typeface="Calibri"/>
               </a:rPr>
-              <a:t>Treaties and incentive batches need approval by a second person; you cannot approve your own finance vouchers, claims settlements or renewals.</a:t>
+              <a:t>Treaties need approval by a second person; incentive batches are calculated and approved by Finance; you cannot approve your own vouchers, claims settlements or renewals.</a:t>
             </a:r>
           </a:p>
         </p:txBody>
@@ -15275,6 +15309,27 @@
         <p:txBody>
           <a:bodyPr wrap="square" lIns="18288" rIns="18288" tIns="18288" bIns="18288"/>
           <a:lstStyle/>
+          <a:p>
+            <a:pPr marL="201168" indent="-182880">
+              <a:spcAft>
+                <a:spcPts val="200"/>
+              </a:spcAft>
+              <a:buClr>
+                <a:srgbClr val="1E88E5"/>
+              </a:buClr>
+              <a:buFont typeface="Arial"/>
+              <a:buChar char="•"/>
+            </a:pPr>
+            <a:r>
+              <a:rPr sz="900">
+                <a:solidFill>
+                  <a:srgbClr val="1F2937"/>
+                </a:solidFill>
+                <a:latin typeface="Calibri"/>
+              </a:rPr>
+              <a:t>All Reports: the 19 catalogue reports</a:t>
+            </a:r>
+          </a:p>
           <a:p>
             <a:pPr marL="201168" indent="-182880">
               <a:spcAft>
